--- a/curso/pptx/S44.pptx
+++ b/curso/pptx/S44.pptx
@@ -5461,7 +5461,7 @@
                 </a:solidFill>
                 <a:latin typeface="Nunito Sans"/>
               </a:rPr>
-              <a:t>Preguntarme: «¿qué me haría cambiar de opinión?»</a:t>
+              <a:t>问问自己：“什么会让我改变看法？”</a:t>
             </a:r>
           </a:p>
           <a:p>
@@ -5486,7 +5486,7 @@
                 </a:solidFill>
                 <a:latin typeface="Nunito Sans"/>
               </a:rPr>
-              <a:t>Buscar a propósito lo que dice lo contrario</a:t>
+              <a:t>有意去找说法相反的东西</a:t>
             </a:r>
           </a:p>
           <a:p>
@@ -5511,7 +5511,7 @@
                 </a:solidFill>
                 <a:latin typeface="Nunito Sans"/>
               </a:rPr>
-              <a:t>Apuntar los aciertos </a:t>
+              <a:t>把做对的</a:t>
             </a:r>
             <a:r>
               <a:rPr sz="2800" b="1">
@@ -5520,7 +5520,7 @@
                 </a:solidFill>
                 <a:latin typeface="Nunito Sans"/>
               </a:rPr>
-              <a:t>y</a:t>
+              <a:t>和</a:t>
             </a:r>
             <a:r>
               <a:rPr sz="2800" b="0">
@@ -5529,7 +5529,7 @@
                 </a:solidFill>
                 <a:latin typeface="Nunito Sans"/>
               </a:rPr>
-              <a:t> los fallos</a:t>
+              <a:t>做错的都记下来</a:t>
             </a:r>
           </a:p>
           <a:p>
@@ -5554,7 +5554,7 @@
                 </a:solidFill>
                 <a:latin typeface="Nunito Sans"/>
               </a:rPr>
-              <a:t>Escuchar a quien piensa distinto sin preparar la respuesta</a:t>
+              <a:t>倾听想法不同的人，不要提前准备好回应</a:t>
             </a:r>
           </a:p>
         </p:txBody>
@@ -7348,7 +7348,7 @@
                 </a:solidFill>
                 <a:latin typeface="Nunito Sans"/>
               </a:rPr>
-              <a:t>Confirmar:</a:t>
+              <a:t>证实：</a:t>
             </a:r>
             <a:r>
               <a:rPr sz="2800" b="0">
@@ -7357,7 +7357,7 @@
                 </a:solidFill>
                 <a:latin typeface="Nunito Sans"/>
               </a:rPr>
-              <a:t> dar por bueno, apoyar</a:t>
+              <a:t>认可，支持</a:t>
             </a:r>
           </a:p>
           <a:p>
@@ -7376,13 +7376,22 @@
               <a:t>• </a:t>
             </a:r>
             <a:r>
+              <a:rPr sz="2800" b="0">
+                <a:solidFill>
+                  <a:srgbClr val="1F2A44"/>
+                </a:solidFill>
+                <a:latin typeface="Nunito Sans"/>
+              </a:rPr>
+              <a:t>我们</a:t>
+            </a:r>
+            <a:r>
               <a:rPr sz="2800" b="1">
                 <a:solidFill>
                   <a:srgbClr val="1F2A44"/>
                 </a:solidFill>
                 <a:latin typeface="Nunito Sans"/>
               </a:rPr>
-              <a:t>Buscamos</a:t>
+              <a:t>寻找</a:t>
             </a:r>
             <a:r>
               <a:rPr sz="2800" b="0">
@@ -7391,7 +7400,7 @@
                 </a:solidFill>
                 <a:latin typeface="Nunito Sans"/>
               </a:rPr>
-              <a:t> lo que nos da la razón</a:t>
+              <a:t>证明我们是对的东西</a:t>
             </a:r>
           </a:p>
           <a:p>
@@ -7410,13 +7419,22 @@
               <a:t>• </a:t>
             </a:r>
             <a:r>
+              <a:rPr sz="2800" b="0">
+                <a:solidFill>
+                  <a:srgbClr val="1F2A44"/>
+                </a:solidFill>
+                <a:latin typeface="Nunito Sans"/>
+              </a:rPr>
+              <a:t>我们更好地</a:t>
+            </a:r>
+            <a:r>
               <a:rPr sz="2800" b="1">
                 <a:solidFill>
                   <a:srgbClr val="1F2A44"/>
                 </a:solidFill>
                 <a:latin typeface="Nunito Sans"/>
               </a:rPr>
-              <a:t>Recordamos</a:t>
+              <a:t>记住</a:t>
             </a:r>
             <a:r>
               <a:rPr sz="2800" b="0">
@@ -7425,7 +7443,7 @@
                 </a:solidFill>
                 <a:latin typeface="Nunito Sans"/>
               </a:rPr>
-              <a:t> mejor lo que nos da la razón</a:t>
+              <a:t>证明我们是对的东西</a:t>
             </a:r>
           </a:p>
           <a:p>
@@ -7444,13 +7462,22 @@
               <a:t>• </a:t>
             </a:r>
             <a:r>
+              <a:rPr sz="2800" b="0">
+                <a:solidFill>
+                  <a:srgbClr val="1F2A44"/>
+                </a:solidFill>
+                <a:latin typeface="Nunito Sans"/>
+              </a:rPr>
+              <a:t>我们把有疑问的数据</a:t>
+            </a:r>
+            <a:r>
               <a:rPr sz="2800" b="1">
                 <a:solidFill>
                   <a:srgbClr val="1F2A44"/>
                 </a:solidFill>
                 <a:latin typeface="Nunito Sans"/>
               </a:rPr>
-              <a:t>Interpretamos</a:t>
+              <a:t>解释</a:t>
             </a:r>
             <a:r>
               <a:rPr sz="2800" b="0">
@@ -7459,7 +7486,7 @@
                 </a:solidFill>
                 <a:latin typeface="Nunito Sans"/>
               </a:rPr>
-              <a:t> los datos dudosos a nuestro favor</a:t>
+              <a:t>得对我们有利</a:t>
             </a:r>
           </a:p>
         </p:txBody>

--- a/curso/pptx/S44.pptx
+++ b/curso/pptx/S44.pptx
@@ -4439,7 +4439,7 @@
                 </a:solidFill>
                 <a:latin typeface="Nunito Sans"/>
               </a:rPr>
-              <a:t>Dylan认为能量饮料帮他学习。他搜索：“能量饮料对学习的好处”。</a:t>
+              <a:t>一个男孩认为能量饮料帮他学习。他搜索：“能量饮料对学习的好处”。</a:t>
             </a:r>
           </a:p>
         </p:txBody>
@@ -5057,7 +5057,7 @@
                 </a:solidFill>
                 <a:latin typeface="Nunito Sans"/>
               </a:rPr>
-              <a:t>Iker认为抽烟对健康有害。他看到一段没有任何来源的视频，说的恰恰相反。他不理它。</a:t>
+              <a:t>一个男孩认为抽烟对健康有害。他看到一段没有任何来源的视频，说的恰恰相反。他不理它。</a:t>
             </a:r>
           </a:p>
         </p:txBody>
